--- a/APMT_Coaching_Stow_FFF_ROBOTSS_AR.pptx
+++ b/APMT_Coaching_Stow_FFF_ROBOTSS_AR.pptx
@@ -127,7 +127,7 @@
   <p:extLst>
     <p:ext uri="{521415D9-36F7-43E2-AB2F-B90AF26B5E84}">
       <p14:sectionLst xmlns:p14="http://schemas.microsoft.com/office/powerpoint/2010/main">
-        <p14:section name="Intro" id="{4b6c960f-f299-1191-e5f5-b63c2f6fd244}">
+        <p14:section name="Intro" id="{c06c0bee-e491-19db-f119-690245501f65}">
           <p14:sldIdLst>
             <p14:sldId id="256"/>
             <p14:sldId id="257"/>
@@ -136,7 +136,7 @@
             <p14:sldId id="260"/>
           </p14:sldIdLst>
         </p14:section>
-        <p14:section name="First Face Fix" id="{2fdc3dd4-5f5a-b59a-9267-d97e82d70783}">
+        <p14:section name="First Face Fix" id="{2c68b1b3-b17b-b411-544d-204a744eeafe}">
           <p14:sldIdLst>
             <p14:sldId id="261"/>
             <p14:sldId id="262"/>
@@ -145,7 +145,7 @@
             <p14:sldId id="265"/>
           </p14:sldIdLst>
         </p14:section>
-        <p14:section name="ROBOTSS" id="{12215a17-517b-a059-f97b-e2eece4387b3}">
+        <p14:section name="ROBOTSS" id="{fdbc85d8-dd06-1f25-e614-f0c6597a7cd7}">
           <p14:sldIdLst>
             <p14:sldId id="266"/>
             <p14:sldId id="267"/>
@@ -158,7 +158,7 @@
             <p14:sldId id="274"/>
           </p14:sldIdLst>
         </p14:section>
-        <p14:section name="Wrap-up" id="{ed5d4233-1853-1c2b-1ff2-21154ec4d9d6}">
+        <p14:section name="Wrap-up" id="{b11d8292-9f52-9f92-7672-9a6cd2afa9c0}">
           <p14:sldIdLst>
             <p14:sldId id="275"/>
             <p14:sldId id="276"/>
